--- a/docs/Benefits-AgentCore-Leadership.pptx
+++ b/docs/Benefits-AgentCore-Leadership.pptx
@@ -1482,7 +1482,7 @@
           <a:p>
             <a:r>
               <a:rPr lang="en-US" dirty="0"/>
-              <a:t>The credibility slide. A reproducible, one-command demo stands the stack up, proves 21 checks in ENFORCE mode, and tears down with zero residual. Four more checks than PV because there are two mask-before forbids and a distinct rules-engine assertion.</a:t>
+              <a:t>The credibility slide. A reproducible, one-command demo stands the stack up, proves 28 checks in ENFORCE mode, and tears down with zero residual. Four more checks than PV because there are two mask-before forbids and a distinct rules-engine assertion.</a:t>
             </a:r>
             <a:endParaRPr lang="en-US" dirty="0"/>
           </a:p>
@@ -2226,7 +2226,7 @@
                 <a:ea typeface="Calibri" pitchFamily="34" charset="-122"/>
                 <a:cs typeface="Calibri" pitchFamily="34" charset="-120"/>
               </a:rPr>
-              <a:t>21 / 21 live governance checks</a:t>
+              <a:t>28 / 28 live governance checks</a:t>
             </a:r>
             <a:endParaRPr lang="en-US" sz="1200" dirty="0"/>
           </a:p>
@@ -6844,7 +6844,7 @@
                 <a:ea typeface="Calibri" pitchFamily="34" charset="-122"/>
                 <a:cs typeface="Calibri" pitchFamily="34" charset="-120"/>
               </a:rPr>
-              <a:t>Stand up the stack live and walk leadership through the 21-check proof.</a:t>
+              <a:t>Stand up the stack live and walk leadership through the 28-check proof.</a:t>
             </a:r>
             <a:endParaRPr lang="en-US" sz="1150" dirty="0"/>
           </a:p>
@@ -14856,7 +14856,7 @@
                 <a:ea typeface="Cambria" pitchFamily="34" charset="-122"/>
                 <a:cs typeface="Cambria" pitchFamily="34" charset="-120"/>
               </a:rPr>
-              <a:t>Proof, not slideware: 21 / 21 governance checks, live on AWS</a:t>
+              <a:t>Proof, not slideware: 28 / 28 governance checks, live on AWS</a:t>
             </a:r>
             <a:endParaRPr lang="en-US" sz="2700" dirty="0"/>
           </a:p>
@@ -14929,7 +14929,7 @@
                 <a:ea typeface="Cambria" pitchFamily="34" charset="-122"/>
                 <a:cs typeface="Cambria" pitchFamily="34" charset="-120"/>
               </a:rPr>
-              <a:t>21/21</a:t>
+              <a:t>28/28</a:t>
             </a:r>
             <a:endParaRPr lang="en-US" sz="3400" dirty="0"/>
           </a:p>

--- a/docs/Benefits-AgentCore-Leadership.pptx
+++ b/docs/Benefits-AgentCore-Leadership.pptx
@@ -2118,7 +2118,7 @@
                 <a:ea typeface="Cambria" pitchFamily="34" charset="-122"/>
                 <a:cs typeface="Cambria" pitchFamily="34" charset="-120"/>
               </a:rPr>
-              <a:t>Proven in Public-Benefits Adjudication</a:t>
+              <a:t>Proven in Public-Benefits Eligibility</a:t>
             </a:r>
             <a:endParaRPr lang="en-US" sz="4000" dirty="0"/>
           </a:p>
@@ -10908,7 +10908,7 @@
                 <a:ea typeface="Cambria" pitchFamily="34" charset="-122"/>
                 <a:cs typeface="Cambria" pitchFamily="34" charset="-120"/>
               </a:rPr>
-              <a:t>Benefits eligibility: adjudicating a SNAP / Medicaid application</a:t>
+              <a:t>Benefits eligibility: determining eligibility from a SNAP / Medicaid application</a:t>
             </a:r>
             <a:endParaRPr lang="en-US" sz="2700" dirty="0"/>
           </a:p>

--- a/docs/Benefits-AgentCore-Leadership.pptx
+++ b/docs/Benefits-AgentCore-Leadership.pptx
@@ -1482,7 +1482,7 @@
           <a:p>
             <a:r>
               <a:rPr lang="en-US" dirty="0"/>
-              <a:t>The credibility slide. A reproducible, one-command demo stands the stack up, proves 28 checks in ENFORCE mode, and tears down with zero residual. Four more checks than PV because there are two mask-before forbids and a distinct rules-engine assertion.</a:t>
+              <a:t>The credibility slide. A reproducible, one-command demo stands the stack up, proves 29 checks in ENFORCE mode, and tears down with zero residual. The count reflects two mask-before forbids and a distinct rules-engine assertion.</a:t>
             </a:r>
             <a:endParaRPr lang="en-US" dirty="0"/>
           </a:p>
@@ -2226,7 +2226,7 @@
                 <a:ea typeface="Calibri" pitchFamily="34" charset="-122"/>
                 <a:cs typeface="Calibri" pitchFamily="34" charset="-120"/>
               </a:rPr>
-              <a:t>28 / 28 live governance checks</a:t>
+              <a:t>29 / 29 live governance checks</a:t>
             </a:r>
             <a:endParaRPr lang="en-US" sz="1200" dirty="0"/>
           </a:p>
@@ -6844,7 +6844,7 @@
                 <a:ea typeface="Calibri" pitchFamily="34" charset="-122"/>
                 <a:cs typeface="Calibri" pitchFamily="34" charset="-120"/>
               </a:rPr>
-              <a:t>Stand up the stack live and walk leadership through the 28-check proof.</a:t>
+              <a:t>Stand up the stack live and walk leadership through the 29-check proof.</a:t>
             </a:r>
             <a:endParaRPr lang="en-US" sz="1150" dirty="0"/>
           </a:p>
@@ -14856,7 +14856,7 @@
                 <a:ea typeface="Cambria" pitchFamily="34" charset="-122"/>
                 <a:cs typeface="Cambria" pitchFamily="34" charset="-120"/>
               </a:rPr>
-              <a:t>Proof, not slideware: 28 / 28 governance checks, live on AWS</a:t>
+              <a:t>Proof, not slideware: 29 / 29 governance checks, live on AWS</a:t>
             </a:r>
             <a:endParaRPr lang="en-US" sz="2700" dirty="0"/>
           </a:p>
@@ -14929,7 +14929,7 @@
                 <a:ea typeface="Cambria" pitchFamily="34" charset="-122"/>
                 <a:cs typeface="Cambria" pitchFamily="34" charset="-120"/>
               </a:rPr>
-              <a:t>28/28</a:t>
+              <a:t>29/29</a:t>
             </a:r>
             <a:endParaRPr lang="en-US" sz="3400" dirty="0"/>
           </a:p>
